--- a/presentations/DevOpsCon_San_Diego_2024/reproducible_builds_devops_con_2024.pptx
+++ b/presentations/DevOpsCon_San_Diego_2024/reproducible_builds_devops_con_2024.pptx
@@ -26,16 +26,17 @@
     <p:sldId id="271" r:id="rId21"/>
     <p:sldId id="272" r:id="rId22"/>
     <p:sldId id="273" r:id="rId23"/>
+    <p:sldId id="274" r:id="rId24"/>
   </p:sldIdLst>
   <p:sldSz cy="5143500" cx="9144000"/>
   <p:notesSz cx="6858000" cy="9144000"/>
   <p:embeddedFontLst>
     <p:embeddedFont>
       <p:font typeface="Roboto Mono"/>
-      <p:regular r:id="rId24"/>
-      <p:bold r:id="rId25"/>
-      <p:italic r:id="rId26"/>
-      <p:boldItalic r:id="rId27"/>
+      <p:regular r:id="rId25"/>
+      <p:bold r:id="rId26"/>
+      <p:italic r:id="rId27"/>
+      <p:boldItalic r:id="rId28"/>
     </p:embeddedFont>
   </p:embeddedFontLst>
   <p:defaultTextStyle>
@@ -2546,7 +2547,7 @@
                   <a:schemeClr val="dk1"/>
                 </a:solidFill>
               </a:rPr>
-              <a:t>While Fedora build bits are stored in git repos and have tools like fedpkg that make retrieving the source for a build easy. You still need a lot of build environment context to do a reproducible build.</a:t>
+              <a:t>Fedora build bits are stored in git repos and have tools like fedpkg that make retrieving the source for a build easy. You still need a lot of build environment context to do a reproducible build.</a:t>
             </a:r>
             <a:endParaRPr>
               <a:solidFill>
@@ -2755,7 +2756,7 @@
                   <a:schemeClr val="dk1"/>
                 </a:solidFill>
               </a:rPr>
-              <a:t>So with a loser definition of reproducible Fedora maybe has a case for reproducibility.</a:t>
+              <a:t>So with a looser definition of reproducible Fedora maybe has a case for reproducibility.</a:t>
             </a:r>
             <a:endParaRPr>
               <a:solidFill>
@@ -3309,7 +3310,7 @@
       </p:grpSpPr>
       <p:sp>
         <p:nvSpPr>
-          <p:cNvPr id="133" name="Google Shape;133;g299af1d47b4_0_766:notes"/>
+          <p:cNvPr id="133" name="Google Shape;133;g2df0cf1d5a3_0_0:notes"/>
           <p:cNvSpPr/>
           <p:nvPr>
             <p:ph idx="2" type="sldImg"/>
@@ -3344,7 +3345,7 @@
       </p:sp>
       <p:sp>
         <p:nvSpPr>
-          <p:cNvPr id="134" name="Google Shape;134;g299af1d47b4_0_766:notes"/>
+          <p:cNvPr id="134" name="Google Shape;134;g2df0cf1d5a3_0_0:notes"/>
           <p:cNvSpPr txBox="1"/>
           <p:nvPr>
             <p:ph idx="1" type="body"/>
@@ -3366,16 +3367,260 @@
           <a:lstStyle/>
           <a:p>
             <a:pPr indent="0" lvl="0" marL="0" rtl="0" algn="l">
-              <a:spcBef>
-                <a:spcPts val="0"/>
-              </a:spcBef>
-              <a:spcAft>
-                <a:spcPts val="0"/>
-              </a:spcAft>
+              <a:lnSpc>
+                <a:spcPct val="115000"/>
+              </a:lnSpc>
+              <a:spcBef>
+                <a:spcPts val="0"/>
+              </a:spcBef>
+              <a:spcAft>
+                <a:spcPts val="0"/>
+              </a:spcAft>
+              <a:buClr>
+                <a:schemeClr val="dk1"/>
+              </a:buClr>
+              <a:buSzPts val="1100"/>
+              <a:buFont typeface="Arial"/>
+              <a:buNone/>
+            </a:pPr>
+            <a:r>
+              <a:rPr lang="en"/>
+              <a:t>Ideally we would have multiple pipelines build the same source code. We would then compare the results and they match.</a:t>
+            </a:r>
+            <a:endParaRPr/>
+          </a:p>
+          <a:p>
+            <a:pPr indent="0" lvl="0" marL="0" rtl="0" algn="l">
+              <a:lnSpc>
+                <a:spcPct val="115000"/>
+              </a:lnSpc>
+              <a:spcBef>
+                <a:spcPts val="0"/>
+              </a:spcBef>
+              <a:spcAft>
+                <a:spcPts val="0"/>
+              </a:spcAft>
+              <a:buClr>
+                <a:schemeClr val="dk1"/>
+              </a:buClr>
+              <a:buSzPts val="1100"/>
+              <a:buFont typeface="Arial"/>
               <a:buNone/>
             </a:pPr>
             <a:r>
               <a:t/>
+            </a:r>
+            <a:endParaRPr/>
+          </a:p>
+          <a:p>
+            <a:pPr indent="0" lvl="0" marL="0" rtl="0" algn="l">
+              <a:lnSpc>
+                <a:spcPct val="115000"/>
+              </a:lnSpc>
+              <a:spcBef>
+                <a:spcPts val="0"/>
+              </a:spcBef>
+              <a:spcAft>
+                <a:spcPts val="0"/>
+              </a:spcAft>
+              <a:buClr>
+                <a:schemeClr val="dk1"/>
+              </a:buClr>
+              <a:buSzPts val="1100"/>
+              <a:buFont typeface="Arial"/>
+              <a:buNone/>
+            </a:pPr>
+            <a:r>
+              <a:rPr lang="en"/>
+              <a:t>This covers several scenarios.</a:t>
+            </a:r>
+            <a:endParaRPr/>
+          </a:p>
+          <a:p>
+            <a:pPr indent="0" lvl="0" marL="0" rtl="0" algn="l">
+              <a:lnSpc>
+                <a:spcPct val="115000"/>
+              </a:lnSpc>
+              <a:spcBef>
+                <a:spcPts val="0"/>
+              </a:spcBef>
+              <a:spcAft>
+                <a:spcPts val="0"/>
+              </a:spcAft>
+              <a:buClr>
+                <a:schemeClr val="dk1"/>
+              </a:buClr>
+              <a:buSzPts val="1100"/>
+              <a:buFont typeface="Arial"/>
+              <a:buNone/>
+            </a:pPr>
+            <a:r>
+              <a:t/>
+            </a:r>
+            <a:endParaRPr/>
+          </a:p>
+          <a:p>
+            <a:pPr indent="0" lvl="0" marL="0" rtl="0" algn="l">
+              <a:lnSpc>
+                <a:spcPct val="115000"/>
+              </a:lnSpc>
+              <a:spcBef>
+                <a:spcPts val="0"/>
+              </a:spcBef>
+              <a:spcAft>
+                <a:spcPts val="0"/>
+              </a:spcAft>
+              <a:buClr>
+                <a:schemeClr val="dk1"/>
+              </a:buClr>
+              <a:buSzPts val="1100"/>
+              <a:buFont typeface="Arial"/>
+              <a:buNone/>
+            </a:pPr>
+            <a:r>
+              <a:rPr lang="en"/>
+              <a:t>The source are not compromised.</a:t>
+            </a:r>
+            <a:endParaRPr/>
+          </a:p>
+          <a:p>
+            <a:pPr indent="0" lvl="0" marL="0" rtl="0" algn="l">
+              <a:lnSpc>
+                <a:spcPct val="115000"/>
+              </a:lnSpc>
+              <a:spcBef>
+                <a:spcPts val="0"/>
+              </a:spcBef>
+              <a:spcAft>
+                <a:spcPts val="0"/>
+              </a:spcAft>
+              <a:buClr>
+                <a:schemeClr val="dk1"/>
+              </a:buClr>
+              <a:buSzPts val="1100"/>
+              <a:buFont typeface="Arial"/>
+              <a:buNone/>
+            </a:pPr>
+            <a:r>
+              <a:t/>
+            </a:r>
+            <a:endParaRPr/>
+          </a:p>
+          <a:p>
+            <a:pPr indent="0" lvl="0" marL="0" rtl="0" algn="l">
+              <a:lnSpc>
+                <a:spcPct val="115000"/>
+              </a:lnSpc>
+              <a:spcBef>
+                <a:spcPts val="0"/>
+              </a:spcBef>
+              <a:spcAft>
+                <a:spcPts val="0"/>
+              </a:spcAft>
+              <a:buClr>
+                <a:schemeClr val="dk1"/>
+              </a:buClr>
+              <a:buSzPts val="1100"/>
+              <a:buFont typeface="Arial"/>
+              <a:buNone/>
+            </a:pPr>
+            <a:r>
+              <a:rPr lang="en"/>
+              <a:t>The inputs are not compromised.</a:t>
+            </a:r>
+            <a:endParaRPr/>
+          </a:p>
+          <a:p>
+            <a:pPr indent="0" lvl="0" marL="0" rtl="0" algn="l">
+              <a:lnSpc>
+                <a:spcPct val="115000"/>
+              </a:lnSpc>
+              <a:spcBef>
+                <a:spcPts val="0"/>
+              </a:spcBef>
+              <a:spcAft>
+                <a:spcPts val="0"/>
+              </a:spcAft>
+              <a:buClr>
+                <a:schemeClr val="dk1"/>
+              </a:buClr>
+              <a:buSzPts val="1100"/>
+              <a:buFont typeface="Arial"/>
+              <a:buNone/>
+            </a:pPr>
+            <a:r>
+              <a:t/>
+            </a:r>
+            <a:endParaRPr/>
+          </a:p>
+          <a:p>
+            <a:pPr indent="0" lvl="0" marL="0" rtl="0" algn="l">
+              <a:lnSpc>
+                <a:spcPct val="115000"/>
+              </a:lnSpc>
+              <a:spcBef>
+                <a:spcPts val="0"/>
+              </a:spcBef>
+              <a:spcAft>
+                <a:spcPts val="0"/>
+              </a:spcAft>
+              <a:buClr>
+                <a:schemeClr val="dk1"/>
+              </a:buClr>
+              <a:buSzPts val="1100"/>
+              <a:buFont typeface="Arial"/>
+              <a:buNone/>
+            </a:pPr>
+            <a:r>
+              <a:rPr lang="en"/>
+              <a:t>The instructions are not compromised.</a:t>
+            </a:r>
+            <a:endParaRPr/>
+          </a:p>
+          <a:p>
+            <a:pPr indent="0" lvl="0" marL="0" rtl="0" algn="l">
+              <a:lnSpc>
+                <a:spcPct val="115000"/>
+              </a:lnSpc>
+              <a:spcBef>
+                <a:spcPts val="0"/>
+              </a:spcBef>
+              <a:spcAft>
+                <a:spcPts val="0"/>
+              </a:spcAft>
+              <a:buClr>
+                <a:schemeClr val="dk1"/>
+              </a:buClr>
+              <a:buSzPts val="1100"/>
+              <a:buFont typeface="Arial"/>
+              <a:buNone/>
+            </a:pPr>
+            <a:r>
+              <a:t/>
+            </a:r>
+            <a:endParaRPr/>
+          </a:p>
+          <a:p>
+            <a:pPr indent="0" lvl="0" marL="0" rtl="0" algn="l">
+              <a:lnSpc>
+                <a:spcPct val="115000"/>
+              </a:lnSpc>
+              <a:spcBef>
+                <a:spcPts val="0"/>
+              </a:spcBef>
+              <a:spcAft>
+                <a:spcPts val="0"/>
+              </a:spcAft>
+              <a:buClr>
+                <a:schemeClr val="dk1"/>
+              </a:buClr>
+              <a:buSzPts val="1100"/>
+              <a:buFont typeface="Arial"/>
+              <a:buNone/>
+            </a:pPr>
+            <a:r>
+              <a:rPr lang="en"/>
+              <a:t>The environment is not compromised.</a:t>
             </a:r>
             <a:endParaRPr/>
           </a:p>
@@ -3408,7 +3653,7 @@
       </p:grpSpPr>
       <p:sp>
         <p:nvSpPr>
-          <p:cNvPr id="139" name="Google Shape;139;g299af1d47b4_0_799:notes"/>
+          <p:cNvPr id="139" name="Google Shape;139;g299af1d47b4_0_766:notes"/>
           <p:cNvSpPr/>
           <p:nvPr>
             <p:ph idx="2" type="sldImg"/>
@@ -3443,7 +3688,7 @@
       </p:sp>
       <p:sp>
         <p:nvSpPr>
-          <p:cNvPr id="140" name="Google Shape;140;g299af1d47b4_0_799:notes"/>
+          <p:cNvPr id="140" name="Google Shape;140;g299af1d47b4_0_766:notes"/>
           <p:cNvSpPr txBox="1"/>
           <p:nvPr>
             <p:ph idx="1" type="body"/>
@@ -3493,7 +3738,7 @@
   <p:cSld>
     <p:spTree>
       <p:nvGrpSpPr>
-        <p:cNvPr id="143" name="Shape 143"/>
+        <p:cNvPr id="144" name="Shape 144"/>
         <p:cNvGrpSpPr/>
         <p:nvPr/>
       </p:nvGrpSpPr>
@@ -3507,7 +3752,7 @@
       </p:grpSpPr>
       <p:sp>
         <p:nvSpPr>
-          <p:cNvPr id="144" name="Google Shape;144;g299af1d47b4_0_803:notes"/>
+          <p:cNvPr id="145" name="Google Shape;145;g299af1d47b4_0_799:notes"/>
           <p:cNvSpPr/>
           <p:nvPr>
             <p:ph idx="2" type="sldImg"/>
@@ -3542,7 +3787,7 @@
       </p:sp>
       <p:sp>
         <p:nvSpPr>
-          <p:cNvPr id="145" name="Google Shape;145;g299af1d47b4_0_803:notes"/>
+          <p:cNvPr id="146" name="Google Shape;146;g299af1d47b4_0_799:notes"/>
           <p:cNvSpPr txBox="1"/>
           <p:nvPr>
             <p:ph idx="1" type="body"/>
@@ -3592,7 +3837,7 @@
   <p:cSld>
     <p:spTree>
       <p:nvGrpSpPr>
-        <p:cNvPr id="150" name="Shape 150"/>
+        <p:cNvPr id="149" name="Shape 149"/>
         <p:cNvGrpSpPr/>
         <p:nvPr/>
       </p:nvGrpSpPr>
@@ -3606,7 +3851,7 @@
       </p:grpSpPr>
       <p:sp>
         <p:nvSpPr>
-          <p:cNvPr id="151" name="Google Shape;151;g299af1d47b4_0_808:notes"/>
+          <p:cNvPr id="150" name="Google Shape;150;g299af1d47b4_0_803:notes"/>
           <p:cNvSpPr/>
           <p:nvPr>
             <p:ph idx="2" type="sldImg"/>
@@ -3641,7 +3886,7 @@
       </p:sp>
       <p:sp>
         <p:nvSpPr>
-          <p:cNvPr id="152" name="Google Shape;152;g299af1d47b4_0_808:notes"/>
+          <p:cNvPr id="151" name="Google Shape;151;g299af1d47b4_0_803:notes"/>
           <p:cNvSpPr txBox="1"/>
           <p:nvPr>
             <p:ph idx="1" type="body"/>
@@ -3705,7 +3950,7 @@
       </p:grpSpPr>
       <p:sp>
         <p:nvSpPr>
-          <p:cNvPr id="157" name="Google Shape;157;g2de4e47ca2e_0_0:notes"/>
+          <p:cNvPr id="157" name="Google Shape;157;g299af1d47b4_0_808:notes"/>
           <p:cNvSpPr/>
           <p:nvPr>
             <p:ph idx="2" type="sldImg"/>
@@ -3740,7 +3985,106 @@
       </p:sp>
       <p:sp>
         <p:nvSpPr>
-          <p:cNvPr id="158" name="Google Shape;158;g2de4e47ca2e_0_0:notes"/>
+          <p:cNvPr id="158" name="Google Shape;158;g299af1d47b4_0_808:notes"/>
+          <p:cNvSpPr txBox="1"/>
+          <p:nvPr>
+            <p:ph idx="1" type="body"/>
+          </p:nvPr>
+        </p:nvSpPr>
+        <p:spPr>
+          <a:xfrm>
+            <a:off x="685800" y="4343400"/>
+            <a:ext cx="5486400" cy="4114800"/>
+          </a:xfrm>
+          <a:prstGeom prst="rect">
+            <a:avLst/>
+          </a:prstGeom>
+        </p:spPr>
+        <p:txBody>
+          <a:bodyPr anchorCtr="0" anchor="t" bIns="91425" lIns="91425" spcFirstLastPara="1" rIns="91425" wrap="square" tIns="91425">
+            <a:noAutofit/>
+          </a:bodyPr>
+          <a:lstStyle/>
+          <a:p>
+            <a:pPr indent="0" lvl="0" marL="0" rtl="0" algn="l">
+              <a:spcBef>
+                <a:spcPts val="0"/>
+              </a:spcBef>
+              <a:spcAft>
+                <a:spcPts val="0"/>
+              </a:spcAft>
+              <a:buNone/>
+            </a:pPr>
+            <a:r>
+              <a:t/>
+            </a:r>
+            <a:endParaRPr/>
+          </a:p>
+        </p:txBody>
+      </p:sp>
+    </p:spTree>
+  </p:cSld>
+  <p:clrMapOvr>
+    <a:masterClrMapping/>
+  </p:clrMapOvr>
+</p:notes>
+</file>
+
+<file path=ppt/notesSlides/notesSlide19.xml><?xml version="1.0" encoding="utf-8"?>
+<p:notes xmlns:a="http://schemas.openxmlformats.org/drawingml/2006/main" xmlns:r="http://schemas.openxmlformats.org/officeDocument/2006/relationships" xmlns:mc="http://schemas.openxmlformats.org/markup-compatibility/2006" xmlns:mv="urn:schemas-microsoft-com:mac:vml" xmlns:p="http://schemas.openxmlformats.org/presentationml/2006/main" xmlns:c="http://schemas.openxmlformats.org/drawingml/2006/chart" xmlns:dgm="http://schemas.openxmlformats.org/drawingml/2006/diagram" xmlns:o="urn:schemas-microsoft-com:office:office" xmlns:v="urn:schemas-microsoft-com:vml" xmlns:pvml="urn:schemas-microsoft-com:office:powerpoint" xmlns:com="http://schemas.openxmlformats.org/drawingml/2006/compatibility" xmlns:p14="http://schemas.microsoft.com/office/powerpoint/2010/main" xmlns:p15="http://schemas.microsoft.com/office/powerpoint/2012/main" xmlns:ahyp="http://schemas.microsoft.com/office/drawing/2018/hyperlinkcolor" showMasterPhAnim="0" showMasterSp="0">
+  <p:cSld>
+    <p:spTree>
+      <p:nvGrpSpPr>
+        <p:cNvPr id="162" name="Shape 162"/>
+        <p:cNvGrpSpPr/>
+        <p:nvPr/>
+      </p:nvGrpSpPr>
+      <p:grpSpPr>
+        <a:xfrm>
+          <a:off x="0" y="0"/>
+          <a:ext cx="0" cy="0"/>
+          <a:chOff x="0" y="0"/>
+          <a:chExt cx="0" cy="0"/>
+        </a:xfrm>
+      </p:grpSpPr>
+      <p:sp>
+        <p:nvSpPr>
+          <p:cNvPr id="163" name="Google Shape;163;g2de4e47ca2e_0_0:notes"/>
+          <p:cNvSpPr/>
+          <p:nvPr>
+            <p:ph idx="2" type="sldImg"/>
+          </p:nvPr>
+        </p:nvSpPr>
+        <p:spPr>
+          <a:xfrm>
+            <a:off x="381300" y="685800"/>
+            <a:ext cx="6096000" cy="3429000"/>
+          </a:xfrm>
+          <a:custGeom>
+            <a:rect b="b" l="l" r="r" t="t"/>
+            <a:pathLst>
+              <a:path extrusionOk="0" h="120000" w="120000">
+                <a:moveTo>
+                  <a:pt x="0" y="0"/>
+                </a:moveTo>
+                <a:lnTo>
+                  <a:pt x="120000" y="0"/>
+                </a:lnTo>
+                <a:lnTo>
+                  <a:pt x="120000" y="120000"/>
+                </a:lnTo>
+                <a:lnTo>
+                  <a:pt x="0" y="120000"/>
+                </a:lnTo>
+                <a:close/>
+              </a:path>
+            </a:pathLst>
+          </a:custGeom>
+        </p:spPr>
+      </p:sp>
+      <p:sp>
+        <p:nvSpPr>
+          <p:cNvPr id="164" name="Google Shape;164;g2de4e47ca2e_0_0:notes"/>
           <p:cNvSpPr txBox="1"/>
           <p:nvPr>
             <p:ph idx="1" type="body"/>
@@ -4564,7 +4908,7 @@
             </a:pPr>
             <a:r>
               <a:rPr lang="en"/>
-              <a:t>The relevant attributes of the build environment, the build instructions and the source code as well as the expected reproducible artifacts are defined by the authors or distributors. </a:t>
+              <a:t>The relevant attributes of the build environment, the build instructions, and the source code as well as the expected reproducible artifacts are defined by the authors or distributors. </a:t>
             </a:r>
             <a:endParaRPr/>
           </a:p>
@@ -11646,7 +11990,7 @@
                   <a:schemeClr val="lt1"/>
                 </a:solidFill>
               </a:rPr>
-              <a:t>Wrap up</a:t>
+              <a:t>The Ideal Reproducible Build</a:t>
             </a:r>
             <a:endParaRPr>
               <a:solidFill>
@@ -11666,8 +12010,8 @@
         </p:nvSpPr>
         <p:spPr>
           <a:xfrm>
-            <a:off x="1771800" y="1047850"/>
-            <a:ext cx="5600400" cy="3416400"/>
+            <a:off x="311700" y="1048225"/>
+            <a:ext cx="8520600" cy="3416400"/>
           </a:xfrm>
           <a:prstGeom prst="rect">
             <a:avLst/>
@@ -11679,12 +12023,12 @@
           </a:bodyPr>
           <a:lstStyle/>
           <a:p>
-            <a:pPr indent="0" lvl="0" marL="0" rtl="0" algn="l">
-              <a:spcBef>
-                <a:spcPts val="0"/>
-              </a:spcBef>
-              <a:spcAft>
-                <a:spcPts val="0"/>
+            <a:pPr indent="0" lvl="0" marL="0" rtl="0" algn="ctr">
+              <a:spcBef>
+                <a:spcPts val="0"/>
+              </a:spcBef>
+              <a:spcAft>
+                <a:spcPts val="1200"/>
               </a:spcAft>
               <a:buNone/>
             </a:pPr>
@@ -11694,122 +12038,7 @@
                   <a:schemeClr val="lt1"/>
                 </a:solidFill>
               </a:rPr>
-              <a:t>Are the toolchains containerized?</a:t>
-            </a:r>
-            <a:endParaRPr sz="2400">
-              <a:solidFill>
-                <a:schemeClr val="lt1"/>
-              </a:solidFill>
-            </a:endParaRPr>
-          </a:p>
-          <a:p>
-            <a:pPr indent="0" lvl="0" marL="0" rtl="0" algn="l">
-              <a:spcBef>
-                <a:spcPts val="1200"/>
-              </a:spcBef>
-              <a:spcAft>
-                <a:spcPts val="0"/>
-              </a:spcAft>
-              <a:buNone/>
-            </a:pPr>
-            <a:r>
-              <a:rPr lang="en" sz="2400">
-                <a:solidFill>
-                  <a:schemeClr val="lt1"/>
-                </a:solidFill>
-              </a:rPr>
-              <a:t>Are the build environments immutable?</a:t>
-            </a:r>
-            <a:endParaRPr sz="2400">
-              <a:solidFill>
-                <a:schemeClr val="lt1"/>
-              </a:solidFill>
-            </a:endParaRPr>
-          </a:p>
-          <a:p>
-            <a:pPr indent="0" lvl="0" marL="0" rtl="0" algn="l">
-              <a:spcBef>
-                <a:spcPts val="1200"/>
-              </a:spcBef>
-              <a:spcAft>
-                <a:spcPts val="0"/>
-              </a:spcAft>
-              <a:buNone/>
-            </a:pPr>
-            <a:r>
-              <a:rPr lang="en" sz="2400">
-                <a:solidFill>
-                  <a:schemeClr val="lt1"/>
-                </a:solidFill>
-              </a:rPr>
-              <a:t>Are the build inputs always available?</a:t>
-            </a:r>
-            <a:endParaRPr sz="2400">
-              <a:solidFill>
-                <a:schemeClr val="lt1"/>
-              </a:solidFill>
-            </a:endParaRPr>
-          </a:p>
-          <a:p>
-            <a:pPr indent="0" lvl="0" marL="0" rtl="0" algn="l">
-              <a:spcBef>
-                <a:spcPts val="1200"/>
-              </a:spcBef>
-              <a:spcAft>
-                <a:spcPts val="0"/>
-              </a:spcAft>
-              <a:buNone/>
-            </a:pPr>
-            <a:r>
-              <a:rPr lang="en" sz="2400">
-                <a:solidFill>
-                  <a:schemeClr val="lt1"/>
-                </a:solidFill>
-              </a:rPr>
-              <a:t>Are the sources verifiable?</a:t>
-            </a:r>
-            <a:endParaRPr sz="2400">
-              <a:solidFill>
-                <a:schemeClr val="lt1"/>
-              </a:solidFill>
-            </a:endParaRPr>
-          </a:p>
-          <a:p>
-            <a:pPr indent="0" lvl="0" marL="0" rtl="0" algn="l">
-              <a:spcBef>
-                <a:spcPts val="1200"/>
-              </a:spcBef>
-              <a:spcAft>
-                <a:spcPts val="0"/>
-              </a:spcAft>
-              <a:buNone/>
-            </a:pPr>
-            <a:r>
-              <a:rPr lang="en" sz="2400">
-                <a:solidFill>
-                  <a:schemeClr val="lt1"/>
-                </a:solidFill>
-              </a:rPr>
-              <a:t>Are the builds instructions repeatable?</a:t>
-            </a:r>
-            <a:endParaRPr sz="2400">
-              <a:solidFill>
-                <a:schemeClr val="lt1"/>
-              </a:solidFill>
-            </a:endParaRPr>
-          </a:p>
-          <a:p>
-            <a:pPr indent="0" lvl="0" marL="0" rtl="0" algn="l">
-              <a:spcBef>
-                <a:spcPts val="1200"/>
-              </a:spcBef>
-              <a:spcAft>
-                <a:spcPts val="1200"/>
-              </a:spcAft>
-              <a:buNone/>
-            </a:pPr>
-            <a:r>
-              <a:t/>
+              <a:t>More than one pipeline build the same source</a:t>
             </a:r>
             <a:endParaRPr>
               <a:solidFill>
@@ -11854,37 +12083,200 @@
         </p:nvSpPr>
         <p:spPr>
           <a:xfrm>
-            <a:off x="311700" y="208100"/>
-            <a:ext cx="8520600" cy="4180500"/>
+            <a:off x="311700" y="118050"/>
+            <a:ext cx="8520600" cy="572700"/>
           </a:xfrm>
           <a:prstGeom prst="rect">
             <a:avLst/>
           </a:prstGeom>
         </p:spPr>
         <p:txBody>
-          <a:bodyPr anchorCtr="0" anchor="ctr" bIns="91425" lIns="91425" spcFirstLastPara="1" rIns="91425" wrap="square" tIns="91425">
+          <a:bodyPr anchorCtr="0" anchor="t" bIns="91425" lIns="91425" spcFirstLastPara="1" rIns="91425" wrap="square" tIns="91425">
+            <a:normAutofit fontScale="90000"/>
+          </a:bodyPr>
+          <a:lstStyle/>
+          <a:p>
+            <a:pPr indent="0" lvl="0" marL="0" rtl="0" algn="ctr">
+              <a:spcBef>
+                <a:spcPts val="0"/>
+              </a:spcBef>
+              <a:spcAft>
+                <a:spcPts val="0"/>
+              </a:spcAft>
+              <a:buNone/>
+            </a:pPr>
+            <a:r>
+              <a:rPr lang="en">
+                <a:solidFill>
+                  <a:schemeClr val="lt1"/>
+                </a:solidFill>
+              </a:rPr>
+              <a:t>Wrap up</a:t>
+            </a:r>
+            <a:endParaRPr>
+              <a:solidFill>
+                <a:schemeClr val="lt1"/>
+              </a:solidFill>
+            </a:endParaRPr>
+          </a:p>
+        </p:txBody>
+      </p:sp>
+      <p:sp>
+        <p:nvSpPr>
+          <p:cNvPr id="143" name="Google Shape;143;p27"/>
+          <p:cNvSpPr txBox="1"/>
+          <p:nvPr>
+            <p:ph idx="1" type="body"/>
+          </p:nvPr>
+        </p:nvSpPr>
+        <p:spPr>
+          <a:xfrm>
+            <a:off x="1771800" y="1047850"/>
+            <a:ext cx="5600400" cy="3416400"/>
+          </a:xfrm>
+          <a:prstGeom prst="rect">
+            <a:avLst/>
+          </a:prstGeom>
+        </p:spPr>
+        <p:txBody>
+          <a:bodyPr anchorCtr="0" anchor="t" bIns="91425" lIns="91425" spcFirstLastPara="1" rIns="91425" wrap="square" tIns="91425">
             <a:normAutofit/>
           </a:bodyPr>
           <a:lstStyle/>
           <a:p>
-            <a:pPr indent="0" lvl="0" marL="0" rtl="0" algn="ctr">
-              <a:spcBef>
-                <a:spcPts val="0"/>
-              </a:spcBef>
-              <a:spcAft>
-                <a:spcPts val="0"/>
-              </a:spcAft>
-              <a:buNone/>
-            </a:pPr>
-            <a:r>
-              <a:rPr lang="en" sz="4800">
+            <a:pPr indent="0" lvl="0" marL="0" rtl="0" algn="l">
+              <a:spcBef>
+                <a:spcPts val="0"/>
+              </a:spcBef>
+              <a:spcAft>
+                <a:spcPts val="0"/>
+              </a:spcAft>
+              <a:buNone/>
+            </a:pPr>
+            <a:r>
+              <a:rPr lang="en" sz="2400">
                 <a:solidFill>
                   <a:schemeClr val="lt1"/>
                 </a:solidFill>
               </a:rPr>
-              <a:t>AMA</a:t>
-            </a:r>
-            <a:endParaRPr sz="4800">
+              <a:t>Are the toolchains containerized?</a:t>
+            </a:r>
+            <a:endParaRPr sz="2400">
+              <a:solidFill>
+                <a:schemeClr val="lt1"/>
+              </a:solidFill>
+            </a:endParaRPr>
+          </a:p>
+          <a:p>
+            <a:pPr indent="0" lvl="0" marL="0" rtl="0" algn="l">
+              <a:spcBef>
+                <a:spcPts val="1200"/>
+              </a:spcBef>
+              <a:spcAft>
+                <a:spcPts val="0"/>
+              </a:spcAft>
+              <a:buNone/>
+            </a:pPr>
+            <a:r>
+              <a:rPr lang="en" sz="2400">
+                <a:solidFill>
+                  <a:schemeClr val="lt1"/>
+                </a:solidFill>
+              </a:rPr>
+              <a:t>Are the build environments immutable?</a:t>
+            </a:r>
+            <a:endParaRPr sz="2400">
+              <a:solidFill>
+                <a:schemeClr val="lt1"/>
+              </a:solidFill>
+            </a:endParaRPr>
+          </a:p>
+          <a:p>
+            <a:pPr indent="0" lvl="0" marL="0" rtl="0" algn="l">
+              <a:spcBef>
+                <a:spcPts val="1200"/>
+              </a:spcBef>
+              <a:spcAft>
+                <a:spcPts val="0"/>
+              </a:spcAft>
+              <a:buNone/>
+            </a:pPr>
+            <a:r>
+              <a:rPr lang="en" sz="2400">
+                <a:solidFill>
+                  <a:schemeClr val="lt1"/>
+                </a:solidFill>
+              </a:rPr>
+              <a:t>Are the build inputs always available?</a:t>
+            </a:r>
+            <a:endParaRPr sz="2400">
+              <a:solidFill>
+                <a:schemeClr val="lt1"/>
+              </a:solidFill>
+            </a:endParaRPr>
+          </a:p>
+          <a:p>
+            <a:pPr indent="0" lvl="0" marL="0" rtl="0" algn="l">
+              <a:spcBef>
+                <a:spcPts val="1200"/>
+              </a:spcBef>
+              <a:spcAft>
+                <a:spcPts val="0"/>
+              </a:spcAft>
+              <a:buNone/>
+            </a:pPr>
+            <a:r>
+              <a:rPr lang="en" sz="2400">
+                <a:solidFill>
+                  <a:schemeClr val="lt1"/>
+                </a:solidFill>
+              </a:rPr>
+              <a:t>Are the sources verifiable?</a:t>
+            </a:r>
+            <a:endParaRPr sz="2400">
+              <a:solidFill>
+                <a:schemeClr val="lt1"/>
+              </a:solidFill>
+            </a:endParaRPr>
+          </a:p>
+          <a:p>
+            <a:pPr indent="0" lvl="0" marL="0" rtl="0" algn="l">
+              <a:spcBef>
+                <a:spcPts val="1200"/>
+              </a:spcBef>
+              <a:spcAft>
+                <a:spcPts val="0"/>
+              </a:spcAft>
+              <a:buNone/>
+            </a:pPr>
+            <a:r>
+              <a:rPr lang="en" sz="2400">
+                <a:solidFill>
+                  <a:schemeClr val="lt1"/>
+                </a:solidFill>
+              </a:rPr>
+              <a:t>Are the builds instructions repeatable?</a:t>
+            </a:r>
+            <a:endParaRPr sz="2400">
+              <a:solidFill>
+                <a:schemeClr val="lt1"/>
+              </a:solidFill>
+            </a:endParaRPr>
+          </a:p>
+          <a:p>
+            <a:pPr indent="0" lvl="0" marL="0" rtl="0" algn="l">
+              <a:spcBef>
+                <a:spcPts val="1200"/>
+              </a:spcBef>
+              <a:spcAft>
+                <a:spcPts val="1200"/>
+              </a:spcAft>
+              <a:buNone/>
+            </a:pPr>
+            <a:r>
+              <a:t/>
+            </a:r>
+            <a:endParaRPr>
               <a:solidFill>
                 <a:schemeClr val="lt1"/>
               </a:solidFill>
@@ -11905,7 +12297,7 @@
   <p:cSld>
     <p:spTree>
       <p:nvGrpSpPr>
-        <p:cNvPr id="146" name="Shape 146"/>
+        <p:cNvPr id="147" name="Shape 147"/>
         <p:cNvGrpSpPr/>
         <p:nvPr/>
       </p:nvGrpSpPr>
@@ -11919,7 +12311,80 @@
       </p:grpSpPr>
       <p:sp>
         <p:nvSpPr>
-          <p:cNvPr id="147" name="Google Shape;147;p28"/>
+          <p:cNvPr id="148" name="Google Shape;148;p28"/>
+          <p:cNvSpPr txBox="1"/>
+          <p:nvPr>
+            <p:ph type="title"/>
+          </p:nvPr>
+        </p:nvSpPr>
+        <p:spPr>
+          <a:xfrm>
+            <a:off x="311700" y="208100"/>
+            <a:ext cx="8520600" cy="4180500"/>
+          </a:xfrm>
+          <a:prstGeom prst="rect">
+            <a:avLst/>
+          </a:prstGeom>
+        </p:spPr>
+        <p:txBody>
+          <a:bodyPr anchorCtr="0" anchor="ctr" bIns="91425" lIns="91425" spcFirstLastPara="1" rIns="91425" wrap="square" tIns="91425">
+            <a:normAutofit/>
+          </a:bodyPr>
+          <a:lstStyle/>
+          <a:p>
+            <a:pPr indent="0" lvl="0" marL="0" rtl="0" algn="ctr">
+              <a:spcBef>
+                <a:spcPts val="0"/>
+              </a:spcBef>
+              <a:spcAft>
+                <a:spcPts val="0"/>
+              </a:spcAft>
+              <a:buNone/>
+            </a:pPr>
+            <a:r>
+              <a:rPr lang="en" sz="4800">
+                <a:solidFill>
+                  <a:schemeClr val="lt1"/>
+                </a:solidFill>
+              </a:rPr>
+              <a:t>AMA</a:t>
+            </a:r>
+            <a:endParaRPr sz="4800">
+              <a:solidFill>
+                <a:schemeClr val="lt1"/>
+              </a:solidFill>
+            </a:endParaRPr>
+          </a:p>
+        </p:txBody>
+      </p:sp>
+    </p:spTree>
+  </p:cSld>
+  <p:clrMapOvr>
+    <a:masterClrMapping/>
+  </p:clrMapOvr>
+</p:sld>
+</file>
+
+<file path=ppt/slides/slide17.xml><?xml version="1.0" encoding="utf-8"?>
+<p:sld xmlns:a="http://schemas.openxmlformats.org/drawingml/2006/main" xmlns:r="http://schemas.openxmlformats.org/officeDocument/2006/relationships" xmlns:mc="http://schemas.openxmlformats.org/markup-compatibility/2006" xmlns:mv="urn:schemas-microsoft-com:mac:vml" xmlns:p="http://schemas.openxmlformats.org/presentationml/2006/main" xmlns:c="http://schemas.openxmlformats.org/drawingml/2006/chart" xmlns:dgm="http://schemas.openxmlformats.org/drawingml/2006/diagram" xmlns:o="urn:schemas-microsoft-com:office:office" xmlns:v="urn:schemas-microsoft-com:vml" xmlns:pvml="urn:schemas-microsoft-com:office:powerpoint" xmlns:com="http://schemas.openxmlformats.org/drawingml/2006/compatibility" xmlns:p14="http://schemas.microsoft.com/office/powerpoint/2010/main" xmlns:p15="http://schemas.microsoft.com/office/powerpoint/2012/main" xmlns:ahyp="http://schemas.microsoft.com/office/drawing/2018/hyperlinkcolor">
+  <p:cSld>
+    <p:spTree>
+      <p:nvGrpSpPr>
+        <p:cNvPr id="152" name="Shape 152"/>
+        <p:cNvGrpSpPr/>
+        <p:nvPr/>
+      </p:nvGrpSpPr>
+      <p:grpSpPr>
+        <a:xfrm>
+          <a:off x="0" y="0"/>
+          <a:ext cx="0" cy="0"/>
+          <a:chOff x="0" y="0"/>
+          <a:chExt cx="0" cy="0"/>
+        </a:xfrm>
+      </p:grpSpPr>
+      <p:sp>
+        <p:nvSpPr>
+          <p:cNvPr id="153" name="Google Shape;153;p29"/>
           <p:cNvSpPr txBox="1"/>
           <p:nvPr>
             <p:ph type="title"/>
@@ -11967,7 +12432,7 @@
       </p:sp>
       <p:sp>
         <p:nvSpPr>
-          <p:cNvPr id="148" name="Google Shape;148;p28"/>
+          <p:cNvPr id="154" name="Google Shape;154;p29"/>
           <p:cNvSpPr txBox="1"/>
           <p:nvPr/>
         </p:nvSpPr>
@@ -12045,7 +12510,7 @@
       </p:sp>
       <p:pic>
         <p:nvPicPr>
-          <p:cNvPr id="149" name="Google Shape;149;p28"/>
+          <p:cNvPr id="155" name="Google Shape;155;p29"/>
           <p:cNvPicPr preferRelativeResize="0"/>
           <p:nvPr/>
         </p:nvPicPr>
@@ -12079,12 +12544,12 @@
 </p:sld>
 </file>
 
-<file path=ppt/slides/slide17.xml><?xml version="1.0" encoding="utf-8"?>
+<file path=ppt/slides/slide18.xml><?xml version="1.0" encoding="utf-8"?>
 <p:sld xmlns:a="http://schemas.openxmlformats.org/drawingml/2006/main" xmlns:r="http://schemas.openxmlformats.org/officeDocument/2006/relationships" xmlns:mc="http://schemas.openxmlformats.org/markup-compatibility/2006" xmlns:mv="urn:schemas-microsoft-com:mac:vml" xmlns:p="http://schemas.openxmlformats.org/presentationml/2006/main" xmlns:c="http://schemas.openxmlformats.org/drawingml/2006/chart" xmlns:dgm="http://schemas.openxmlformats.org/drawingml/2006/diagram" xmlns:o="urn:schemas-microsoft-com:office:office" xmlns:v="urn:schemas-microsoft-com:vml" xmlns:pvml="urn:schemas-microsoft-com:office:powerpoint" xmlns:com="http://schemas.openxmlformats.org/drawingml/2006/compatibility" xmlns:p14="http://schemas.microsoft.com/office/powerpoint/2010/main" xmlns:p15="http://schemas.microsoft.com/office/powerpoint/2012/main" xmlns:ahyp="http://schemas.microsoft.com/office/drawing/2018/hyperlinkcolor">
   <p:cSld>
     <p:spTree>
       <p:nvGrpSpPr>
-        <p:cNvPr id="153" name="Shape 153"/>
+        <p:cNvPr id="159" name="Shape 159"/>
         <p:cNvGrpSpPr/>
         <p:nvPr/>
       </p:nvGrpSpPr>
@@ -12098,7 +12563,7 @@
       </p:grpSpPr>
       <p:sp>
         <p:nvSpPr>
-          <p:cNvPr id="154" name="Google Shape;154;p29"/>
+          <p:cNvPr id="160" name="Google Shape;160;p30"/>
           <p:cNvSpPr txBox="1"/>
           <p:nvPr>
             <p:ph type="title"/>
@@ -12146,7 +12611,7 @@
       </p:sp>
       <p:sp>
         <p:nvSpPr>
-          <p:cNvPr id="155" name="Google Shape;155;p29"/>
+          <p:cNvPr id="161" name="Google Shape;161;p30"/>
           <p:cNvSpPr txBox="1"/>
           <p:nvPr>
             <p:ph idx="1" type="body"/>
@@ -12563,12 +13028,12 @@
 </p:sld>
 </file>
 
-<file path=ppt/slides/slide18.xml><?xml version="1.0" encoding="utf-8"?>
+<file path=ppt/slides/slide19.xml><?xml version="1.0" encoding="utf-8"?>
 <p:sld xmlns:a="http://schemas.openxmlformats.org/drawingml/2006/main" xmlns:r="http://schemas.openxmlformats.org/officeDocument/2006/relationships" xmlns:mc="http://schemas.openxmlformats.org/markup-compatibility/2006" xmlns:mv="urn:schemas-microsoft-com:mac:vml" xmlns:p="http://schemas.openxmlformats.org/presentationml/2006/main" xmlns:c="http://schemas.openxmlformats.org/drawingml/2006/chart" xmlns:dgm="http://schemas.openxmlformats.org/drawingml/2006/diagram" xmlns:o="urn:schemas-microsoft-com:office:office" xmlns:v="urn:schemas-microsoft-com:vml" xmlns:pvml="urn:schemas-microsoft-com:office:powerpoint" xmlns:com="http://schemas.openxmlformats.org/drawingml/2006/compatibility" xmlns:p14="http://schemas.microsoft.com/office/powerpoint/2010/main" xmlns:p15="http://schemas.microsoft.com/office/powerpoint/2012/main" xmlns:ahyp="http://schemas.microsoft.com/office/drawing/2018/hyperlinkcolor">
   <p:cSld>
     <p:spTree>
       <p:nvGrpSpPr>
-        <p:cNvPr id="159" name="Shape 159"/>
+        <p:cNvPr id="165" name="Shape 165"/>
         <p:cNvGrpSpPr/>
         <p:nvPr/>
       </p:nvGrpSpPr>
@@ -12582,7 +13047,7 @@
       </p:grpSpPr>
       <p:pic>
         <p:nvPicPr>
-          <p:cNvPr id="160" name="Google Shape;160;p30"/>
+          <p:cNvPr id="166" name="Google Shape;166;p31"/>
           <p:cNvPicPr preferRelativeResize="0"/>
           <p:nvPr/>
         </p:nvPicPr>
@@ -13634,7 +14099,7 @@
                   <a:schemeClr val="lt1"/>
                 </a:solidFill>
               </a:rPr>
-              <a:t>The relevant attributes of the build environment, the build instructions and the source code as well as the expected reproducible artifacts are defined by the authors or distributors. The artifacts of a build are the parts of the build results that are the desired primary output.</a:t>
+              <a:t>The relevant attributes of the build environment, the build instructions, and the source code as well as the expected reproducible artifacts are defined by the authors or distributors. The artifacts of a build are the parts of the build results that are the desired primary output.</a:t>
             </a:r>
             <a:endParaRPr>
               <a:solidFill>
@@ -14797,8 +15262,8 @@
         </p:nvSpPr>
         <p:spPr>
           <a:xfrm>
-            <a:off x="311700" y="1152475"/>
-            <a:ext cx="8520600" cy="3708600"/>
+            <a:off x="311700" y="813950"/>
+            <a:ext cx="8520600" cy="3688800"/>
           </a:xfrm>
           <a:prstGeom prst="rect">
             <a:avLst/>
@@ -15241,6 +15706,285 @@
 </file>
 
 <file path=ppt/theme/theme1.xml><?xml version="1.0" encoding="utf-8"?>
+<a:theme xmlns:a="http://schemas.openxmlformats.org/drawingml/2006/main" xmlns:r="http://schemas.openxmlformats.org/officeDocument/2006/relationships">
+  <a:themeElements>
+    <a:clrScheme name="Default">
+      <a:dk1>
+        <a:srgbClr val="000000"/>
+      </a:dk1>
+      <a:lt1>
+        <a:srgbClr val="FFFFFF"/>
+      </a:lt1>
+      <a:dk2>
+        <a:srgbClr val="158158"/>
+      </a:dk2>
+      <a:lt2>
+        <a:srgbClr val="F3F3F3"/>
+      </a:lt2>
+      <a:accent1>
+        <a:srgbClr val="058DC7"/>
+      </a:accent1>
+      <a:accent2>
+        <a:srgbClr val="50B432"/>
+      </a:accent2>
+      <a:accent3>
+        <a:srgbClr val="ED561B"/>
+      </a:accent3>
+      <a:accent4>
+        <a:srgbClr val="EDEF00"/>
+      </a:accent4>
+      <a:accent5>
+        <a:srgbClr val="24CBE5"/>
+      </a:accent5>
+      <a:accent6>
+        <a:srgbClr val="64E572"/>
+      </a:accent6>
+      <a:hlink>
+        <a:srgbClr val="2200CC"/>
+      </a:hlink>
+      <a:folHlink>
+        <a:srgbClr val="551A8B"/>
+      </a:folHlink>
+    </a:clrScheme>
+    <a:fontScheme name="Office">
+      <a:majorFont>
+        <a:latin typeface="Arial"/>
+        <a:ea typeface=""/>
+        <a:cs typeface=""/>
+        <a:font script="Jpan" typeface="ＭＳ Ｐゴシック"/>
+        <a:font script="Hang" typeface="맑은 고딕"/>
+        <a:font script="Hans" typeface="宋体"/>
+        <a:font script="Hant" typeface="新細明體"/>
+        <a:font script="Arab" typeface="Times New Roman"/>
+        <a:font script="Hebr" typeface="Times New Roman"/>
+        <a:font script="Thai" typeface="Angsana New"/>
+        <a:font script="Ethi" typeface="Nyala"/>
+        <a:font script="Beng" typeface="Vrinda"/>
+        <a:font script="Gujr" typeface="Shruti"/>
+        <a:font script="Khmr" typeface="MoolBoran"/>
+        <a:font script="Knda" typeface="Tunga"/>
+        <a:font script="Guru" typeface="Raavi"/>
+        <a:font script="Cans" typeface="Euphemia"/>
+        <a:font script="Cher" typeface="Plantagenet Cherokee"/>
+        <a:font script="Yiii" typeface="Microsoft Yi Baiti"/>
+        <a:font script="Tibt" typeface="Microsoft Himalaya"/>
+        <a:font script="Thaa" typeface="MV Boli"/>
+        <a:font script="Deva" typeface="Mangal"/>
+        <a:font script="Telu" typeface="Gautami"/>
+        <a:font script="Taml" typeface="Latha"/>
+        <a:font script="Syrc" typeface="Estrangelo Edessa"/>
+        <a:font script="Orya" typeface="Kalinga"/>
+        <a:font script="Mlym" typeface="Kartika"/>
+        <a:font script="Laoo" typeface="DokChampa"/>
+        <a:font script="Sinh" typeface="Iskoola Pota"/>
+        <a:font script="Mong" typeface="Mongolian Baiti"/>
+        <a:font script="Viet" typeface="Times New Roman"/>
+        <a:font script="Uigh" typeface="Microsoft Uighur"/>
+        <a:font script="Geor" typeface="Sylfaen"/>
+      </a:majorFont>
+      <a:minorFont>
+        <a:latin typeface="Arial"/>
+        <a:ea typeface=""/>
+        <a:cs typeface=""/>
+        <a:font script="Jpan" typeface="ＭＳ Ｐゴシック"/>
+        <a:font script="Hang" typeface="맑은 고딕"/>
+        <a:font script="Hans" typeface="宋体"/>
+        <a:font script="Hant" typeface="新細明體"/>
+        <a:font script="Arab" typeface="Arial"/>
+        <a:font script="Hebr" typeface="Arial"/>
+        <a:font script="Thai" typeface="Cordia New"/>
+        <a:font script="Ethi" typeface="Nyala"/>
+        <a:font script="Beng" typeface="Vrinda"/>
+        <a:font script="Gujr" typeface="Shruti"/>
+        <a:font script="Khmr" typeface="DaunPenh"/>
+        <a:font script="Knda" typeface="Tunga"/>
+        <a:font script="Guru" typeface="Raavi"/>
+        <a:font script="Cans" typeface="Euphemia"/>
+        <a:font script="Cher" typeface="Plantagenet Cherokee"/>
+        <a:font script="Yiii" typeface="Microsoft Yi Baiti"/>
+        <a:font script="Tibt" typeface="Microsoft Himalaya"/>
+        <a:font script="Thaa" typeface="MV Boli"/>
+        <a:font script="Deva" typeface="Mangal"/>
+        <a:font script="Telu" typeface="Gautami"/>
+        <a:font script="Taml" typeface="Latha"/>
+        <a:font script="Syrc" typeface="Estrangelo Edessa"/>
+        <a:font script="Orya" typeface="Kalinga"/>
+        <a:font script="Mlym" typeface="Kartika"/>
+        <a:font script="Laoo" typeface="DokChampa"/>
+        <a:font script="Sinh" typeface="Iskoola Pota"/>
+        <a:font script="Mong" typeface="Mongolian Baiti"/>
+        <a:font script="Viet" typeface="Arial"/>
+        <a:font script="Uigh" typeface="Microsoft Uighur"/>
+        <a:font script="Geor" typeface="Sylfaen"/>
+      </a:minorFont>
+    </a:fontScheme>
+    <a:fmtScheme name="Office">
+      <a:fillStyleLst>
+        <a:solidFill>
+          <a:schemeClr val="phClr"/>
+        </a:solidFill>
+        <a:gradFill rotWithShape="1">
+          <a:gsLst>
+            <a:gs pos="0">
+              <a:schemeClr val="phClr">
+                <a:tint val="50000"/>
+                <a:satMod val="300000"/>
+              </a:schemeClr>
+            </a:gs>
+            <a:gs pos="35000">
+              <a:schemeClr val="phClr">
+                <a:tint val="37000"/>
+                <a:satMod val="300000"/>
+              </a:schemeClr>
+            </a:gs>
+            <a:gs pos="100000">
+              <a:schemeClr val="phClr">
+                <a:tint val="15000"/>
+                <a:satMod val="350000"/>
+              </a:schemeClr>
+            </a:gs>
+          </a:gsLst>
+          <a:lin ang="16200000" scaled="1"/>
+        </a:gradFill>
+        <a:gradFill rotWithShape="1">
+          <a:gsLst>
+            <a:gs pos="0">
+              <a:schemeClr val="phClr">
+                <a:tint val="100000"/>
+                <a:shade val="100000"/>
+                <a:satMod val="130000"/>
+              </a:schemeClr>
+            </a:gs>
+            <a:gs pos="100000">
+              <a:schemeClr val="phClr">
+                <a:tint val="50000"/>
+                <a:shade val="100000"/>
+                <a:satMod val="350000"/>
+              </a:schemeClr>
+            </a:gs>
+          </a:gsLst>
+          <a:lin ang="16200000" scaled="0"/>
+        </a:gradFill>
+      </a:fillStyleLst>
+      <a:lnStyleLst>
+        <a:ln w="9525" cap="flat" cmpd="sng" algn="ctr">
+          <a:solidFill>
+            <a:schemeClr val="phClr">
+              <a:shade val="95000"/>
+              <a:satMod val="105000"/>
+            </a:schemeClr>
+          </a:solidFill>
+          <a:prstDash val="solid"/>
+        </a:ln>
+        <a:ln w="25400" cap="flat" cmpd="sng" algn="ctr">
+          <a:solidFill>
+            <a:schemeClr val="phClr"/>
+          </a:solidFill>
+          <a:prstDash val="solid"/>
+        </a:ln>
+        <a:ln w="38100" cap="flat" cmpd="sng" algn="ctr">
+          <a:solidFill>
+            <a:schemeClr val="phClr"/>
+          </a:solidFill>
+          <a:prstDash val="solid"/>
+        </a:ln>
+      </a:lnStyleLst>
+      <a:effectStyleLst>
+        <a:effectStyle>
+          <a:effectLst>
+            <a:outerShdw blurRad="40000" dist="20000" dir="5400000" rotWithShape="0">
+              <a:srgbClr val="000000">
+                <a:alpha val="38000"/>
+              </a:srgbClr>
+            </a:outerShdw>
+          </a:effectLst>
+        </a:effectStyle>
+        <a:effectStyle>
+          <a:effectLst>
+            <a:outerShdw blurRad="40000" dist="23000" dir="5400000" rotWithShape="0">
+              <a:srgbClr val="000000">
+                <a:alpha val="35000"/>
+              </a:srgbClr>
+            </a:outerShdw>
+          </a:effectLst>
+        </a:effectStyle>
+        <a:effectStyle>
+          <a:effectLst>
+            <a:outerShdw blurRad="40000" dist="23000" dir="5400000" rotWithShape="0">
+              <a:srgbClr val="000000">
+                <a:alpha val="35000"/>
+              </a:srgbClr>
+            </a:outerShdw>
+          </a:effectLst>
+          <a:scene3d>
+            <a:camera prst="orthographicFront">
+              <a:rot lat="0" lon="0" rev="0"/>
+            </a:camera>
+            <a:lightRig rig="threePt" dir="t">
+              <a:rot lat="0" lon="0" rev="1200000"/>
+            </a:lightRig>
+          </a:scene3d>
+          <a:sp3d>
+            <a:bevelT w="63500" h="25400"/>
+          </a:sp3d>
+        </a:effectStyle>
+      </a:effectStyleLst>
+      <a:bgFillStyleLst>
+        <a:solidFill>
+          <a:schemeClr val="phClr"/>
+        </a:solidFill>
+        <a:gradFill rotWithShape="1">
+          <a:gsLst>
+            <a:gs pos="0">
+              <a:schemeClr val="phClr">
+                <a:tint val="40000"/>
+                <a:satMod val="350000"/>
+              </a:schemeClr>
+            </a:gs>
+            <a:gs pos="40000">
+              <a:schemeClr val="phClr">
+                <a:tint val="45000"/>
+                <a:shade val="99000"/>
+                <a:satMod val="350000"/>
+              </a:schemeClr>
+            </a:gs>
+            <a:gs pos="100000">
+              <a:schemeClr val="phClr">
+                <a:shade val="20000"/>
+                <a:satMod val="255000"/>
+              </a:schemeClr>
+            </a:gs>
+          </a:gsLst>
+          <a:path path="circle">
+            <a:fillToRect l="50000" t="-80000" r="50000" b="180000"/>
+          </a:path>
+        </a:gradFill>
+        <a:gradFill rotWithShape="1">
+          <a:gsLst>
+            <a:gs pos="0">
+              <a:schemeClr val="phClr">
+                <a:tint val="80000"/>
+                <a:satMod val="300000"/>
+              </a:schemeClr>
+            </a:gs>
+            <a:gs pos="100000">
+              <a:schemeClr val="phClr">
+                <a:shade val="30000"/>
+                <a:satMod val="200000"/>
+              </a:schemeClr>
+            </a:gs>
+          </a:gsLst>
+          <a:path path="circle">
+            <a:fillToRect l="50000" t="50000" r="50000" b="50000"/>
+          </a:path>
+        </a:gradFill>
+      </a:bgFillStyleLst>
+    </a:fmtScheme>
+  </a:themeElements>
+</a:theme>
+</file>
+
+<file path=ppt/theme/theme2.xml><?xml version="1.0" encoding="utf-8"?>
 <a:theme xmlns:a="http://schemas.openxmlformats.org/drawingml/2006/main" xmlns:r="http://schemas.openxmlformats.org/officeDocument/2006/relationships" name="Simple Dark">
   <a:themeElements>
     <a:clrScheme name="Simple Dark">
@@ -15517,283 +16261,4 @@
     </a:fmtScheme>
   </a:themeElements>
 </a:theme>
-</file>
-
-<file path=ppt/theme/theme2.xml><?xml version="1.0" encoding="utf-8"?>
-<a:theme xmlns:a="http://schemas.openxmlformats.org/drawingml/2006/main" xmlns:r="http://schemas.openxmlformats.org/officeDocument/2006/relationships">
-  <a:themeElements>
-    <a:clrScheme name="Default">
-      <a:dk1>
-        <a:srgbClr val="000000"/>
-      </a:dk1>
-      <a:lt1>
-        <a:srgbClr val="FFFFFF"/>
-      </a:lt1>
-      <a:dk2>
-        <a:srgbClr val="158158"/>
-      </a:dk2>
-      <a:lt2>
-        <a:srgbClr val="F3F3F3"/>
-      </a:lt2>
-      <a:accent1>
-        <a:srgbClr val="058DC7"/>
-      </a:accent1>
-      <a:accent2>
-        <a:srgbClr val="50B432"/>
-      </a:accent2>
-      <a:accent3>
-        <a:srgbClr val="ED561B"/>
-      </a:accent3>
-      <a:accent4>
-        <a:srgbClr val="EDEF00"/>
-      </a:accent4>
-      <a:accent5>
-        <a:srgbClr val="24CBE5"/>
-      </a:accent5>
-      <a:accent6>
-        <a:srgbClr val="64E572"/>
-      </a:accent6>
-      <a:hlink>
-        <a:srgbClr val="2200CC"/>
-      </a:hlink>
-      <a:folHlink>
-        <a:srgbClr val="551A8B"/>
-      </a:folHlink>
-    </a:clrScheme>
-    <a:fontScheme name="Office">
-      <a:majorFont>
-        <a:latin typeface="Arial"/>
-        <a:ea typeface=""/>
-        <a:cs typeface=""/>
-        <a:font script="Jpan" typeface="ＭＳ Ｐゴシック"/>
-        <a:font script="Hang" typeface="맑은 고딕"/>
-        <a:font script="Hans" typeface="宋体"/>
-        <a:font script="Hant" typeface="新細明體"/>
-        <a:font script="Arab" typeface="Times New Roman"/>
-        <a:font script="Hebr" typeface="Times New Roman"/>
-        <a:font script="Thai" typeface="Angsana New"/>
-        <a:font script="Ethi" typeface="Nyala"/>
-        <a:font script="Beng" typeface="Vrinda"/>
-        <a:font script="Gujr" typeface="Shruti"/>
-        <a:font script="Khmr" typeface="MoolBoran"/>
-        <a:font script="Knda" typeface="Tunga"/>
-        <a:font script="Guru" typeface="Raavi"/>
-        <a:font script="Cans" typeface="Euphemia"/>
-        <a:font script="Cher" typeface="Plantagenet Cherokee"/>
-        <a:font script="Yiii" typeface="Microsoft Yi Baiti"/>
-        <a:font script="Tibt" typeface="Microsoft Himalaya"/>
-        <a:font script="Thaa" typeface="MV Boli"/>
-        <a:font script="Deva" typeface="Mangal"/>
-        <a:font script="Telu" typeface="Gautami"/>
-        <a:font script="Taml" typeface="Latha"/>
-        <a:font script="Syrc" typeface="Estrangelo Edessa"/>
-        <a:font script="Orya" typeface="Kalinga"/>
-        <a:font script="Mlym" typeface="Kartika"/>
-        <a:font script="Laoo" typeface="DokChampa"/>
-        <a:font script="Sinh" typeface="Iskoola Pota"/>
-        <a:font script="Mong" typeface="Mongolian Baiti"/>
-        <a:font script="Viet" typeface="Times New Roman"/>
-        <a:font script="Uigh" typeface="Microsoft Uighur"/>
-        <a:font script="Geor" typeface="Sylfaen"/>
-      </a:majorFont>
-      <a:minorFont>
-        <a:latin typeface="Arial"/>
-        <a:ea typeface=""/>
-        <a:cs typeface=""/>
-        <a:font script="Jpan" typeface="ＭＳ Ｐゴシック"/>
-        <a:font script="Hang" typeface="맑은 고딕"/>
-        <a:font script="Hans" typeface="宋体"/>
-        <a:font script="Hant" typeface="新細明體"/>
-        <a:font script="Arab" typeface="Arial"/>
-        <a:font script="Hebr" typeface="Arial"/>
-        <a:font script="Thai" typeface="Cordia New"/>
-        <a:font script="Ethi" typeface="Nyala"/>
-        <a:font script="Beng" typeface="Vrinda"/>
-        <a:font script="Gujr" typeface="Shruti"/>
-        <a:font script="Khmr" typeface="DaunPenh"/>
-        <a:font script="Knda" typeface="Tunga"/>
-        <a:font script="Guru" typeface="Raavi"/>
-        <a:font script="Cans" typeface="Euphemia"/>
-        <a:font script="Cher" typeface="Plantagenet Cherokee"/>
-        <a:font script="Yiii" typeface="Microsoft Yi Baiti"/>
-        <a:font script="Tibt" typeface="Microsoft Himalaya"/>
-        <a:font script="Thaa" typeface="MV Boli"/>
-        <a:font script="Deva" typeface="Mangal"/>
-        <a:font script="Telu" typeface="Gautami"/>
-        <a:font script="Taml" typeface="Latha"/>
-        <a:font script="Syrc" typeface="Estrangelo Edessa"/>
-        <a:font script="Orya" typeface="Kalinga"/>
-        <a:font script="Mlym" typeface="Kartika"/>
-        <a:font script="Laoo" typeface="DokChampa"/>
-        <a:font script="Sinh" typeface="Iskoola Pota"/>
-        <a:font script="Mong" typeface="Mongolian Baiti"/>
-        <a:font script="Viet" typeface="Arial"/>
-        <a:font script="Uigh" typeface="Microsoft Uighur"/>
-        <a:font script="Geor" typeface="Sylfaen"/>
-      </a:minorFont>
-    </a:fontScheme>
-    <a:fmtScheme name="Office">
-      <a:fillStyleLst>
-        <a:solidFill>
-          <a:schemeClr val="phClr"/>
-        </a:solidFill>
-        <a:gradFill rotWithShape="1">
-          <a:gsLst>
-            <a:gs pos="0">
-              <a:schemeClr val="phClr">
-                <a:tint val="50000"/>
-                <a:satMod val="300000"/>
-              </a:schemeClr>
-            </a:gs>
-            <a:gs pos="35000">
-              <a:schemeClr val="phClr">
-                <a:tint val="37000"/>
-                <a:satMod val="300000"/>
-              </a:schemeClr>
-            </a:gs>
-            <a:gs pos="100000">
-              <a:schemeClr val="phClr">
-                <a:tint val="15000"/>
-                <a:satMod val="350000"/>
-              </a:schemeClr>
-            </a:gs>
-          </a:gsLst>
-          <a:lin ang="16200000" scaled="1"/>
-        </a:gradFill>
-        <a:gradFill rotWithShape="1">
-          <a:gsLst>
-            <a:gs pos="0">
-              <a:schemeClr val="phClr">
-                <a:tint val="100000"/>
-                <a:shade val="100000"/>
-                <a:satMod val="130000"/>
-              </a:schemeClr>
-            </a:gs>
-            <a:gs pos="100000">
-              <a:schemeClr val="phClr">
-                <a:tint val="50000"/>
-                <a:shade val="100000"/>
-                <a:satMod val="350000"/>
-              </a:schemeClr>
-            </a:gs>
-          </a:gsLst>
-          <a:lin ang="16200000" scaled="0"/>
-        </a:gradFill>
-      </a:fillStyleLst>
-      <a:lnStyleLst>
-        <a:ln w="9525" cap="flat" cmpd="sng" algn="ctr">
-          <a:solidFill>
-            <a:schemeClr val="phClr">
-              <a:shade val="95000"/>
-              <a:satMod val="105000"/>
-            </a:schemeClr>
-          </a:solidFill>
-          <a:prstDash val="solid"/>
-        </a:ln>
-        <a:ln w="25400" cap="flat" cmpd="sng" algn="ctr">
-          <a:solidFill>
-            <a:schemeClr val="phClr"/>
-          </a:solidFill>
-          <a:prstDash val="solid"/>
-        </a:ln>
-        <a:ln w="38100" cap="flat" cmpd="sng" algn="ctr">
-          <a:solidFill>
-            <a:schemeClr val="phClr"/>
-          </a:solidFill>
-          <a:prstDash val="solid"/>
-        </a:ln>
-      </a:lnStyleLst>
-      <a:effectStyleLst>
-        <a:effectStyle>
-          <a:effectLst>
-            <a:outerShdw blurRad="40000" dist="20000" dir="5400000" rotWithShape="0">
-              <a:srgbClr val="000000">
-                <a:alpha val="38000"/>
-              </a:srgbClr>
-            </a:outerShdw>
-          </a:effectLst>
-        </a:effectStyle>
-        <a:effectStyle>
-          <a:effectLst>
-            <a:outerShdw blurRad="40000" dist="23000" dir="5400000" rotWithShape="0">
-              <a:srgbClr val="000000">
-                <a:alpha val="35000"/>
-              </a:srgbClr>
-            </a:outerShdw>
-          </a:effectLst>
-        </a:effectStyle>
-        <a:effectStyle>
-          <a:effectLst>
-            <a:outerShdw blurRad="40000" dist="23000" dir="5400000" rotWithShape="0">
-              <a:srgbClr val="000000">
-                <a:alpha val="35000"/>
-              </a:srgbClr>
-            </a:outerShdw>
-          </a:effectLst>
-          <a:scene3d>
-            <a:camera prst="orthographicFront">
-              <a:rot lat="0" lon="0" rev="0"/>
-            </a:camera>
-            <a:lightRig rig="threePt" dir="t">
-              <a:rot lat="0" lon="0" rev="1200000"/>
-            </a:lightRig>
-          </a:scene3d>
-          <a:sp3d>
-            <a:bevelT w="63500" h="25400"/>
-          </a:sp3d>
-        </a:effectStyle>
-      </a:effectStyleLst>
-      <a:bgFillStyleLst>
-        <a:solidFill>
-          <a:schemeClr val="phClr"/>
-        </a:solidFill>
-        <a:gradFill rotWithShape="1">
-          <a:gsLst>
-            <a:gs pos="0">
-              <a:schemeClr val="phClr">
-                <a:tint val="40000"/>
-                <a:satMod val="350000"/>
-              </a:schemeClr>
-            </a:gs>
-            <a:gs pos="40000">
-              <a:schemeClr val="phClr">
-                <a:tint val="45000"/>
-                <a:shade val="99000"/>
-                <a:satMod val="350000"/>
-              </a:schemeClr>
-            </a:gs>
-            <a:gs pos="100000">
-              <a:schemeClr val="phClr">
-                <a:shade val="20000"/>
-                <a:satMod val="255000"/>
-              </a:schemeClr>
-            </a:gs>
-          </a:gsLst>
-          <a:path path="circle">
-            <a:fillToRect l="50000" t="-80000" r="50000" b="180000"/>
-          </a:path>
-        </a:gradFill>
-        <a:gradFill rotWithShape="1">
-          <a:gsLst>
-            <a:gs pos="0">
-              <a:schemeClr val="phClr">
-                <a:tint val="80000"/>
-                <a:satMod val="300000"/>
-              </a:schemeClr>
-            </a:gs>
-            <a:gs pos="100000">
-              <a:schemeClr val="phClr">
-                <a:shade val="30000"/>
-                <a:satMod val="200000"/>
-              </a:schemeClr>
-            </a:gs>
-          </a:gsLst>
-          <a:path path="circle">
-            <a:fillToRect l="50000" t="50000" r="50000" b="50000"/>
-          </a:path>
-        </a:gradFill>
-      </a:bgFillStyleLst>
-    </a:fmtScheme>
-  </a:themeElements>
-</a:theme>
 </file>